--- a/lecons/USA/Economic Geography/39_USA_ECO_L30_The_Taaffe_Morrill_and_Gould_Model.pptx
+++ b/lecons/USA/Economic Geography/39_USA_ECO_L30_The_Taaffe_Morrill_and_Gould_Model.pptx
@@ -13469,7 +13469,7 @@
               <a:buNone/>
             </a:pPr>
             <a:r>
-              <a:rPr lang="en-US" sz="4000" b="1" dirty="0">
+              <a:rPr lang="en-US" sz="3200" b="1" dirty="0">
                 <a:solidFill>
                   <a:srgbClr val="111111"/>
                 </a:solidFill>
@@ -13479,7 +13479,7 @@
               </a:rPr>
               <a:t>Topic: Transport Network Development</a:t>
             </a:r>
-            <a:endParaRPr lang="en-US" sz="4000" dirty="0"/>
+            <a:endParaRPr lang="en-US" sz="3200" dirty="0"/>
           </a:p>
           <a:p>
             <a:pPr algn="l" indent="0" marL="0">
@@ -13489,7 +13489,7 @@
               <a:buNone/>
             </a:pPr>
             <a:r>
-              <a:rPr lang="en-US" sz="4000" b="1" dirty="0">
+              <a:rPr lang="en-US" sz="3200" b="1" dirty="0">
                 <a:solidFill>
                   <a:srgbClr val="111111"/>
                 </a:solidFill>
@@ -13499,7 +13499,7 @@
               </a:rPr>
               <a:t>Sub-topic: Transport Network Development Theories</a:t>
             </a:r>
-            <a:endParaRPr lang="en-US" sz="4000" dirty="0"/>
+            <a:endParaRPr lang="en-US" sz="3200" dirty="0"/>
           </a:p>
           <a:p>
             <a:pPr algn="l" indent="0" marL="0">
@@ -13509,7 +13509,7 @@
               <a:buNone/>
             </a:pPr>
             <a:r>
-              <a:rPr lang="en-US" sz="4000" b="1" dirty="0">
+              <a:rPr lang="en-US" sz="3200" b="1" dirty="0">
                 <a:solidFill>
                   <a:srgbClr val="990011"/>
                 </a:solidFill>
@@ -13519,7 +13519,7 @@
               </a:rPr>
               <a:t>Lesson 30: The Taaffe, Morrill and Gould Model</a:t>
             </a:r>
-            <a:endParaRPr lang="en-US" sz="4000" dirty="0"/>
+            <a:endParaRPr lang="en-US" sz="3200" dirty="0"/>
           </a:p>
         </p:txBody>
       </p:sp>
